--- a/it/slides/13-Architettura_dei_Calcolatori-Macchine_Sequenziali-Lab.pptx
+++ b/it/slides/13-Architettura_dei_Calcolatori-Macchine_Sequenziali-Lab.pptx
@@ -121,36 +121,36 @@
   <p:extLst>
     <p:ext uri="{521415D9-36F7-43E2-AB2F-B90AF26B5E84}">
       <p14:sectionLst xmlns:p14="http://schemas.microsoft.com/office/powerpoint/2010/main">
-        <p14:section name="Apertura" id="{97a94770-04ab-a0cb-c1e4-386e9d42356a}">
+        <p14:section name="Apertura" id="{6c5070d7-1a72-0145-d5e3-b6513d58bfea}">
           <p14:sldIdLst>
             <p14:sldId id="256"/>
             <p14:sldId id="257"/>
           </p14:sldIdLst>
         </p14:section>
-        <p14:section name="Riscaldamento sulla macchina" id="{3b5e059d-f486-da90-7282-4f4eb99393a1}">
+        <p14:section name="Riscaldamento sulla macchina" id="{3998b5ce-6bfa-8605-e36f-976080a457cc}">
           <p14:sldIdLst>
             <p14:sldId id="258"/>
           </p14:sldIdLst>
         </p14:section>
-        <p14:section name="Macchine a stati finiti" id="{41efbac8-d98a-7fb0-e9f6-911b0746e3ca}">
+        <p14:section name="Macchine a stati finiti" id="{895183fe-0d6d-0798-f9eb-bc6d52e2f92e}">
           <p14:sldIdLst>
             <p14:sldId id="259"/>
           </p14:sldIdLst>
         </p14:section>
-        <p14:section name="Ritorno alla macchina" id="{2c4b1b3e-6c70-e873-a9a2-7d5d83b3cc1e}">
+        <p14:section name="Ritorno alla macchina" id="{ce87eedc-8342-6fb7-5b36-07f8d9fe6465}">
           <p14:sldIdLst>
             <p14:sldId id="260"/>
             <p14:sldId id="261"/>
           </p14:sldIdLst>
         </p14:section>
-        <p14:section name="Il programma completo" id="{3be195bd-8186-bcc6-a918-dc4ca3f30149}">
+        <p14:section name="Il programma completo" id="{e02a8bb4-c6b6-910b-6d0a-331c5cd3a4b9}">
           <p14:sldIdLst>
             <p14:sldId id="262"/>
             <p14:sldId id="263"/>
             <p14:sldId id="264"/>
           </p14:sldIdLst>
         </p14:section>
-        <p14:section name="Eseguire e provare" id="{839359fc-b6f1-575a-f46f-ebab379727de}">
+        <p14:section name="Eseguire e provare" id="{4bfef87e-bbb7-e72a-86f9-39d998a1a57d}">
           <p14:sldIdLst>
             <p14:sldId id="265"/>
             <p14:sldId id="266"/>
@@ -159,7 +159,7 @@
             <p14:sldId id="269"/>
           </p14:sldIdLst>
         </p14:section>
-        <p14:section name="Esercizi" id="{8dd802b5-2264-2e75-bb20-aeb4111e8648}">
+        <p14:section name="Esercizi" id="{a648bb34-4fed-6d46-fd19-a35c201dda4a}">
           <p14:sldIdLst>
             <p14:sldId id="270"/>
           </p14:sldIdLst>

--- a/it/slides/13-Architettura_dei_Calcolatori-Macchine_Sequenziali-Lab.pptx
+++ b/it/slides/13-Architettura_dei_Calcolatori-Macchine_Sequenziali-Lab.pptx
@@ -121,36 +121,36 @@
   <p:extLst>
     <p:ext uri="{521415D9-36F7-43E2-AB2F-B90AF26B5E84}">
       <p14:sectionLst xmlns:p14="http://schemas.microsoft.com/office/powerpoint/2010/main">
-        <p14:section name="Apertura" id="{6c5070d7-1a72-0145-d5e3-b6513d58bfea}">
+        <p14:section name="Apertura" id="{ba4a6791-9ebc-98da-f55b-a7bd612d82f4}">
           <p14:sldIdLst>
             <p14:sldId id="256"/>
             <p14:sldId id="257"/>
           </p14:sldIdLst>
         </p14:section>
-        <p14:section name="Riscaldamento sulla macchina" id="{3998b5ce-6bfa-8605-e36f-976080a457cc}">
+        <p14:section name="Riscaldamento sulla macchina" id="{4bb543fa-dba8-315b-f1f6-0a7249c419ae}">
           <p14:sldIdLst>
             <p14:sldId id="258"/>
           </p14:sldIdLst>
         </p14:section>
-        <p14:section name="Macchine a stati finiti" id="{895183fe-0d6d-0798-f9eb-bc6d52e2f92e}">
+        <p14:section name="Macchine a stati finiti" id="{f2fef9ac-f7c0-a0a7-5f12-64942fb796ef}">
           <p14:sldIdLst>
             <p14:sldId id="259"/>
           </p14:sldIdLst>
         </p14:section>
-        <p14:section name="Ritorno alla macchina" id="{ce87eedc-8342-6fb7-5b36-07f8d9fe6465}">
+        <p14:section name="Ritorno alla macchina" id="{eeb92743-b88d-67f3-f8d5-7261df504f80}">
           <p14:sldIdLst>
             <p14:sldId id="260"/>
             <p14:sldId id="261"/>
           </p14:sldIdLst>
         </p14:section>
-        <p14:section name="Il programma completo" id="{e02a8bb4-c6b6-910b-6d0a-331c5cd3a4b9}">
+        <p14:section name="Il programma completo" id="{4268cd3a-db7e-8cef-bb91-f321b3b0984b}">
           <p14:sldIdLst>
             <p14:sldId id="262"/>
             <p14:sldId id="263"/>
             <p14:sldId id="264"/>
           </p14:sldIdLst>
         </p14:section>
-        <p14:section name="Eseguire e provare" id="{4bfef87e-bbb7-e72a-86f9-39d998a1a57d}">
+        <p14:section name="Eseguire e provare" id="{58d8ecc4-c0d2-032a-6c06-605068ea81bb}">
           <p14:sldIdLst>
             <p14:sldId id="265"/>
             <p14:sldId id="266"/>
@@ -159,7 +159,7 @@
             <p14:sldId id="269"/>
           </p14:sldIdLst>
         </p14:section>
-        <p14:section name="Esercizi" id="{a648bb34-4fed-6d46-fd19-a35c201dda4a}">
+        <p14:section name="Esercizi" id="{b667f862-9fad-adb0-01f5-f2e4cc35327f}">
           <p14:sldIdLst>
             <p14:sldId id="270"/>
           </p14:sldIdLst>
@@ -570,7 +570,8 @@
               <a:rPr lang="en-US" dirty="0"/>
               <a:t>Questa è la presentazione del codice della Lezione 13. Mentre la presentazione della lezione sviluppa i concetti, questa raccoglie tutto ciò che si scrive e si esegue: ogni listato con il suo commento, il programma completo della lezione, il risultato che deve produrre, e la procedura per provarlo su ciascuno dei tre host. Le due presentazioni vanno lette insieme: i concetti spiegano il codice, e il codice dà ai concetti una conseguenza osservabile.
 Stato di apprendimento: DA COMPRENDERE OGGI, alla fine di questa lezione lo spiegate, lo seguite passo passo e lo applicate da soli; DA UTILIZZARE OGGI, oggi seguite e usate la ricetta; come funziona dentro si spiega più avanti, o non fa parte del corso; DA COMPRENDERE PIÙ AVANTI, riconoscete il nome e lo scopo; lo spiega una lezione successiva. Una slide senza etichetta è contesto: una storia, un esempio, una domanda, un esercizio.
-Stato di apprendimento di questa lezione. DA COMPRENDERE OGGI: macchine a stati finiti; il clock; latch e flip-flop; i registri come flip-flop. DA UTILIZZARE OGGI: il programma completo, gli strumenti di PRG32 (si usa, non si studia, in questo corso). DA COMPRENDERE PIÙ AVANTI: niente. Una slide senza etichetta è contesto: una storia, un esempio, una domanda, un esercizio.</a:t>
+Stato di apprendimento di questa lezione. DA COMPRENDERE OGGI: macchine a stati finiti; il clock; latch e flip-flop; i registri come flip-flop. DA UTILIZZARE OGGI: il programma completo, gli strumenti di PRG32 (si usa, non si studia, in questo corso). DA COMPRENDERE PIÙ AVANTI: niente. Una slide senza etichetta è contesto: una storia, un esempio, una domanda, un esercizio.
+Percorso. I risultati di oggi: (1) descrivere una macchina a stati finiti con un diagramma degli stati; (2) spiegare il clock e perché un circuito deve stabilizzarsi entro un periodo; (3) distinguere un latch da un flip-flop e costruire un registro. Si appoggia su: solo ciò che ha preparato la Lezione 01. Prossimo passo: Lezione 14, Macchine elementari: registri e bus.</a:t>
             </a:r>
             <a:endParaRPr lang="en-US" dirty="0"/>
           </a:p>
